--- a/ai_productivity_alkemy_final.pptx
+++ b/ai_productivity_alkemy_final.pptx
@@ -3325,7 +3325,7 @@
                 </a:solidFill>
                 <a:latin typeface="Inter"/>
               </a:rPr>
-              <a:t>RISK SCORE</a:t>
+              <a:t> RISK SCORE</a:t>
             </a:r>
           </a:p>
         </p:txBody>
@@ -9791,7 +9791,7 @@
                 </a:solidFill>
                 <a:latin typeface="Inter"/>
               </a:rPr>
-              <a:t> FINDING 1</a:t>
+              <a:t> FINDING #1</a:t>
             </a:r>
           </a:p>
         </p:txBody>
@@ -10374,7 +10374,7 @@
                 </a:solidFill>
                 <a:latin typeface="Inter"/>
               </a:rPr>
-              <a:t> FINDING 2</a:t>
+              <a:t> FINDING #2</a:t>
             </a:r>
           </a:p>
         </p:txBody>
@@ -10631,7 +10631,7 @@
             <a:r>
               <a:rPr lang="it-IT" sz="1100" dirty="0">
                 <a:solidFill>
-                  <a:srgbClr val="C8C8D2"/>
+                  <a:srgbClr val="5A5A6E"/>
                 </a:solidFill>
                 <a:latin typeface="Inter"/>
               </a:rPr>
@@ -10791,7 +10791,7 @@
             <a:r>
               <a:rPr lang="it-IT" sz="1000" i="1" dirty="0">
                 <a:solidFill>
-                  <a:srgbClr val="C8C8D2"/>
+                  <a:srgbClr val="5A5A6E"/>
                 </a:solidFill>
                 <a:latin typeface="Inter"/>
               </a:rPr>
@@ -12121,7 +12121,7 @@
                 </a:solidFill>
                 <a:latin typeface="Inter"/>
               </a:rPr>
-              <a:t> FINDING 3</a:t>
+              <a:t> FINDING #3</a:t>
             </a:r>
           </a:p>
         </p:txBody>
@@ -12813,7 +12813,7 @@
                 </a:solidFill>
                 <a:latin typeface="Inter"/>
               </a:rPr>
-              <a:t> FINDING 4</a:t>
+              <a:t> FINDING #4</a:t>
             </a:r>
           </a:p>
         </p:txBody>
@@ -14687,7 +14687,25 @@
                 </a:solidFill>
                 <a:latin typeface="Inter"/>
               </a:rPr>
-              <a:t>, performance peaks in the medium band — cap at 25–50%.</a:t>
+              <a:t>, performance peaks in the medium band, </a:t>
+            </a:r>
+            <a:r>
+              <a:rPr lang="it-IT" sz="1100" dirty="0" err="1">
+                <a:solidFill>
+                  <a:srgbClr val="5A5A6E"/>
+                </a:solidFill>
+                <a:latin typeface="Inter"/>
+              </a:rPr>
+              <a:t>cap</a:t>
+            </a:r>
+            <a:r>
+              <a:rPr lang="it-IT" sz="1100" dirty="0">
+                <a:solidFill>
+                  <a:srgbClr val="5A5A6E"/>
+                </a:solidFill>
+                <a:latin typeface="Inter"/>
+              </a:rPr>
+              <a:t> at 25–50%.</a:t>
             </a:r>
           </a:p>
         </p:txBody>
@@ -14795,7 +14813,7 @@
                 </a:solidFill>
                 <a:latin typeface="Inter"/>
               </a:rPr>
-              <a:t> FINDING 5</a:t>
+              <a:t> FINDING #5</a:t>
             </a:r>
           </a:p>
         </p:txBody>
